--- a/output/apple_deck/Estudio_Apple_EFX.pptx
+++ b/output/apple_deck/Estudio_Apple_EFX.pptx
@@ -3795,7 +3795,7 @@
                 </a:solidFill>
                 <a:latin typeface="Arial"/>
               </a:rPr>
-              <a:t>'New' concentra el 82% de la demanda de tienda y es donde el riesgo baja. El take-up se mide por segmento. '&gt;=G' no aparece: se rechaza siempre, así que no tiene ni aceptación ni riesgo.</a:t>
+              <a:t>'New' concentra el 82% de la demanda de tienda y es donde el riesgo baja. El take-up se mide por segmento y por decisión del motor (aprobada / en revisión). '&gt;=G' no aparece: se rechaza siempre, así que no tiene ni aceptación ni riesgo.</a:t>
             </a:r>
           </a:p>
         </p:txBody>
@@ -5130,7 +5130,7 @@
                 </a:solidFill>
                 <a:latin typeface="Arial"/>
               </a:rPr>
-              <a:t>63,5%</a:t>
+              <a:t>62,5%</a:t>
             </a:r>
           </a:p>
         </p:txBody>
@@ -5648,7 +5648,7 @@
                           </a:solidFill>
                           <a:latin typeface="Arial"/>
                         </a:rPr>
-                        <a:t>33,4%</a:t>
+                        <a:t>31,4%</a:t>
                       </a:r>
                     </a:p>
                   </a:txBody>
@@ -5671,7 +5671,7 @@
                           </a:solidFill>
                           <a:latin typeface="Arial"/>
                         </a:rPr>
-                        <a:t>17,9 M€/mes</a:t>
+                        <a:t>16,8 M€/mes</a:t>
                       </a:r>
                     </a:p>
                   </a:txBody>
@@ -5742,7 +5742,7 @@
                           </a:solidFill>
                           <a:latin typeface="Arial"/>
                         </a:rPr>
-                        <a:t>18,7%</a:t>
+                        <a:t>17,7%</a:t>
                       </a:r>
                     </a:p>
                   </a:txBody>
@@ -5765,7 +5765,7 @@
                           </a:solidFill>
                           <a:latin typeface="Arial"/>
                         </a:rPr>
-                        <a:t>10,0 M€/mes</a:t>
+                        <a:t>9,5 M€/mes</a:t>
                       </a:r>
                     </a:p>
                   </a:txBody>
@@ -5836,7 +5836,7 @@
                           </a:solidFill>
                           <a:latin typeface="Arial"/>
                         </a:rPr>
-                        <a:t>26,9%</a:t>
+                        <a:t>25,3%</a:t>
                       </a:r>
                     </a:p>
                   </a:txBody>
@@ -5859,7 +5859,7 @@
                           </a:solidFill>
                           <a:latin typeface="Arial"/>
                         </a:rPr>
-                        <a:t>14,4 M€/mes</a:t>
+                        <a:t>13,6 M€/mes</a:t>
                       </a:r>
                     </a:p>
                   </a:txBody>
@@ -5930,7 +5930,7 @@
                           </a:solidFill>
                           <a:latin typeface="Arial"/>
                         </a:rPr>
-                        <a:t>29,9%</a:t>
+                        <a:t>28,1%</a:t>
                       </a:r>
                     </a:p>
                   </a:txBody>
@@ -5953,7 +5953,7 @@
                           </a:solidFill>
                           <a:latin typeface="Arial"/>
                         </a:rPr>
-                        <a:t>16,0 M€/mes</a:t>
+                        <a:t>15,1 M€/mes</a:t>
                       </a:r>
                     </a:p>
                   </a:txBody>
@@ -6024,7 +6024,7 @@
                           </a:solidFill>
                           <a:latin typeface="Arial"/>
                         </a:rPr>
-                        <a:t>33,3%</a:t>
+                        <a:t>31,3%</a:t>
                       </a:r>
                     </a:p>
                   </a:txBody>
@@ -6047,7 +6047,7 @@
                           </a:solidFill>
                           <a:latin typeface="Arial"/>
                         </a:rPr>
-                        <a:t>17,9 M€/mes</a:t>
+                        <a:t>16,8 M€/mes</a:t>
                       </a:r>
                     </a:p>
                   </a:txBody>
@@ -7447,7 +7447,7 @@
                           </a:solidFill>
                           <a:latin typeface="Arial"/>
                         </a:rPr>
-                        <a:t>33,4%</a:t>
+                        <a:t>31,4%</a:t>
                       </a:r>
                     </a:p>
                   </a:txBody>
@@ -7541,7 +7541,7 @@
                           </a:solidFill>
                           <a:latin typeface="Arial"/>
                         </a:rPr>
-                        <a:t>18,7%</a:t>
+                        <a:t>17,7%</a:t>
                       </a:r>
                     </a:p>
                   </a:txBody>
@@ -7635,7 +7635,7 @@
                           </a:solidFill>
                           <a:latin typeface="Arial"/>
                         </a:rPr>
-                        <a:t>20,9%</a:t>
+                        <a:t>19,8%</a:t>
                       </a:r>
                     </a:p>
                   </a:txBody>
@@ -7729,7 +7729,7 @@
                           </a:solidFill>
                           <a:latin typeface="Arial"/>
                         </a:rPr>
-                        <a:t>26,9%</a:t>
+                        <a:t>25,3%</a:t>
                       </a:r>
                     </a:p>
                   </a:txBody>
@@ -7823,7 +7823,7 @@
                           </a:solidFill>
                           <a:latin typeface="Arial"/>
                         </a:rPr>
-                        <a:t>27,0%</a:t>
+                        <a:t>25,4%</a:t>
                       </a:r>
                     </a:p>
                   </a:txBody>
@@ -7917,7 +7917,7 @@
                           </a:solidFill>
                           <a:latin typeface="Arial"/>
                         </a:rPr>
-                        <a:t>29,9%</a:t>
+                        <a:t>28,1%</a:t>
                       </a:r>
                     </a:p>
                   </a:txBody>
@@ -8011,7 +8011,7 @@
                           </a:solidFill>
                           <a:latin typeface="Arial"/>
                         </a:rPr>
-                        <a:t>31,2%</a:t>
+                        <a:t>29,3%</a:t>
                       </a:r>
                     </a:p>
                   </a:txBody>
@@ -8105,7 +8105,7 @@
                           </a:solidFill>
                           <a:latin typeface="Arial"/>
                         </a:rPr>
-                        <a:t>33,3%</a:t>
+                        <a:t>31,3%</a:t>
                       </a:r>
                     </a:p>
                   </a:txBody>
@@ -8199,7 +8199,7 @@
                           </a:solidFill>
                           <a:latin typeface="Arial"/>
                         </a:rPr>
-                        <a:t>33,4%</a:t>
+                        <a:t>31,4%</a:t>
                       </a:r>
                     </a:p>
                   </a:txBody>
@@ -8287,7 +8287,7 @@
                 </a:solidFill>
                 <a:latin typeface="Arial"/>
               </a:rPr>
-              <a:t>La parrilla vigente aprueba el 51,8% de la demanda de Online, pero el motor aprobó el 46,4% en esa misma ventana: es 1,12x más laxa, porque Online ha ido aflojando (40,7% de aprobación en 2025Q1, 50,3% en 2025Q4). Así que los 17,9 M€/mes no son solo el efecto de llevar la parrilla a tienda — parte es que la parrilla de hoy ya es más laxa que la política media del periodo sobre el que se mide el riesgo.</a:t>
+              <a:t>La parrilla vigente calca las decisiones reales de Online (acepta el 51,8% de la demanda; el motor aprobó el 51,9%: swap-in 0,6%, swap-out 0,6%) y cada solicitud aceptada convierte a la tasa de su decisión real. La diferencia entre 16,8 y 15,3 M€/mes es por tanto la ganancia de tienda, medida sobre agosto-2026 (único mes con EFX) frente a la ventana completa de 'hoy'.</a:t>
             </a:r>
           </a:p>
         </p:txBody>

--- a/output/apple_deck/Estudio_Apple_EFX.pptx
+++ b/output/apple_deck/Estudio_Apple_EFX.pptx
@@ -3311,7 +3311,7 @@
                 </a:solidFill>
                 <a:latin typeface="Arial"/>
               </a:rPr>
-              <a:t>Riesgos  ·  01-10-2026  ·  perímetro Apple Propio</a:t>
+              <a:t>Riesgos  ·  02-10-2026  ·  perímetro Apple Propio</a:t>
             </a:r>
           </a:p>
         </p:txBody>
@@ -4314,7 +4314,7 @@
                 </a:solidFill>
                 <a:latin typeface="Arial"/>
               </a:rPr>
-              <a:t>Los tramos 1-5 apenas tienen producción, y es donde más pesa el uplift por selección (2,4x). Son los que abren el escenario más laxo.</a:t>
+              <a:t>Los tramos 1-6 apenas tienen producción, y es donde más pesa el uplift por selección (2,4x). Son los que abren el escenario más laxo.</a:t>
             </a:r>
           </a:p>
           <a:p>
@@ -4339,7 +4339,7 @@
                 </a:solidFill>
                 <a:latin typeface="Arial"/>
               </a:rPr>
-              <a:t>La foto sale de agosto-2026. Su estacionalidad propia ya está medida, pero el mix de un único mes puede no ser representativo.</a:t>
+              <a:t>La foto sale de ago-2026. Su estacionalidad propia ya está medida, pero el mix de un único mes puede no ser representativo.</a:t>
             </a:r>
           </a:p>
         </p:txBody>
@@ -6130,7 +6130,7 @@
                 </a:solidFill>
                 <a:latin typeface="Arial"/>
               </a:rPr>
-              <a:t>12 meses de originación madura (4,18% frente a 3,87% con 21 meses).</a:t>
+              <a:t>12 meses de originación madura (4,18% frente a 3,92% con 26 meses).</a:t>
             </a:r>
           </a:p>
           <a:p>
@@ -6155,7 +6155,7 @@
                 </a:solidFill>
                 <a:latin typeface="Arial"/>
               </a:rPr>
-              <a:t>los tramos poco aceptados llevan uplift (hasta 2,4x). No mueve los cortes: donde se decide, Online ya acepta al 84-98%.</a:t>
+              <a:t>los tramos poco aceptados llevan uplift (hasta 2,4x). Apenas mueve los cortes: donde se decide, Online ya acepta al 84-98%.</a:t>
             </a:r>
           </a:p>
         </p:txBody>
@@ -6702,7 +6702,7 @@
                 </a:solidFill>
                 <a:latin typeface="Arial"/>
               </a:rPr>
-              <a:t>Medido sobre el histórico propio de tienda, misma ventana que Online: para describir dónde está hoy no hace falta imputar nada. Acepta casi el triple que Online y arriesga menos. Aviso: su TA viene cayendo (59% en 2025, 47,6% en ago-2026), así que la base se está moviendo.</a:t>
+              <a:t>Medido sobre el histórico propio de tienda, misma ventana que Online: para describir dónde está hoy no hace falta imputar nada. Acepta casi el triple que Online y arriesga menos. Aviso: su TA viene cayendo (58,7% de mar-2025 a feb-2026, 47,6% en ago-2026), así que la base se está moviendo.</a:t>
             </a:r>
           </a:p>
         </p:txBody>
@@ -8287,7 +8287,7 @@
                 </a:solidFill>
                 <a:latin typeface="Arial"/>
               </a:rPr>
-              <a:t>La parrilla vigente calca las decisiones reales de Online (acepta el 51,8% de la demanda; el motor aprobó el 51,9%: swap-in 0,6%, swap-out 0,6%) y cada solicitud aceptada convierte a la tasa de su decisión real. La diferencia entre 16,8 y 15,3 M€/mes es por tanto la ganancia de tienda, medida sobre agosto-2026 (único mes con EFX) frente a la ventana completa de 'hoy'.</a:t>
+              <a:t>La parrilla vigente calca las decisiones reales de Online (acepta el 51,8% de la demanda; el motor aprobó el 51,9%: swap-in 0,6%, swap-out 0,6%) y cada solicitud aceptada convierte a la tasa de su decisión real. La diferencia entre 16,8 y 15,3 M€/mes es por tanto la ganancia de tienda, medida sobre ago-2026 (único mes con EFX) frente a la ventana completa de 'hoy'.</a:t>
             </a:r>
           </a:p>
         </p:txBody>
@@ -12007,7 +12007,7 @@
                 </a:solidFill>
                 <a:latin typeface="Arial"/>
               </a:rPr>
-              <a:t>Índice de agosto: 0,49 en Online y 0,76 en tienda. Online concentra la demanda en el lanzamiento de iPhone (septiembre 2,03) y tienda en Navidad (diciembre 1,70). La correlación entre ambos perfiles es 0,39: no son el mismo patrón.</a:t>
+              <a:t>Índice de agosto: 0,49 en Online y 0,76 en tienda. Online concentra la demanda en el lanzamiento de iPhone (sep 2,03) y tienda en Navidad (dic 1,70). La correlación entre ambos perfiles es 0,39: no son el mismo patrón.</a:t>
             </a:r>
           </a:p>
         </p:txBody>

--- a/output/apple_deck/Estudio_Apple_EFX.pptx
+++ b/output/apple_deck/Estudio_Apple_EFX.pptx
@@ -3311,7 +3311,7 @@
                 </a:solidFill>
                 <a:latin typeface="Arial"/>
               </a:rPr>
-              <a:t>Riesgos  ·  02-10-2026  ·  perímetro Apple Propio</a:t>
+              <a:t>Riesgos  ·  14-10-2026  ·  perímetro Apple Propio</a:t>
             </a:r>
           </a:p>
         </p:txBody>
@@ -3649,7 +3649,7 @@
                 </a:solidFill>
                 <a:latin typeface="Arial"/>
               </a:rPr>
-              <a:t>Tienda ago-2026</a:t>
+              <a:t>Tienda ago-2026 a sep-2026</a:t>
             </a:r>
           </a:p>
         </p:txBody>
@@ -3795,7 +3795,7 @@
                 </a:solidFill>
                 <a:latin typeface="Arial"/>
               </a:rPr>
-              <a:t>'New' concentra el 82% de la demanda de tienda y es donde el riesgo baja. El take-up se mide por segmento y por decisión del motor (aprobada / en revisión). '&gt;=G' no aparece: se rechaza siempre, así que no tiene ni aceptación ni riesgo.</a:t>
+              <a:t>'New' concentra el 81% de la demanda de tienda y es donde el riesgo baja. El take-up se mide por segmento y por decisión del motor (aprobada / en revisión). '&gt;=G' no aparece: se rechaza siempre, así que no tiene ni aceptación ni riesgo.</a:t>
             </a:r>
           </a:p>
         </p:txBody>
@@ -4037,7 +4037,7 @@
                 </a:solidFill>
                 <a:latin typeface="Arial"/>
               </a:rPr>
-              <a:t>El único mes con score en tienda es agosto, así que su peso en Apple depende de cómo se anualice. Tienda tiene su pico en diciembre y septiembre entre sus meses más flojos: usar la curva de Online le habría inflado el peso al 34% cuando con su propia estacionalidad es el 25%.</a:t>
+              <a:t>Tienda solo tiene score en ago-2026 a sep-2026, así que su peso en Apple depende de cómo se anualice. Tienda tiene su pico en diciembre y septiembre es su mes más flojo, el contrario de Online: usar la curva de Online le habría rebajado el peso al 19% cuando con su propia estacionalidad es el 29%.</a:t>
             </a:r>
           </a:p>
         </p:txBody>
@@ -4264,7 +4264,7 @@
                 </a:solidFill>
                 <a:latin typeface="Arial"/>
               </a:rPr>
-              <a:t>Las operaciones de tienda con EFX tienen 0-2 meses y no tienen comportamiento observable. H3 hacia nov-2026, H6 hacia feb-2027.</a:t>
+              <a:t>Las operaciones de tienda con EFX tienen 0-2 meses y no tienen comportamiento observable. H3 hacia dic-2026, H6 hacia mar-2027.</a:t>
             </a:r>
           </a:p>
           <a:p>
@@ -4330,7 +4330,7 @@
                 </a:solidFill>
                 <a:latin typeface="Arial"/>
               </a:rPr>
-              <a:t>Un solo mes de tienda.  </a:t>
+              <a:t>Solo ago-2026 a sep-2026 en tienda.  </a:t>
             </a:r>
             <a:r>
               <a:rPr sz="1200">
@@ -4339,7 +4339,7 @@
                 </a:solidFill>
                 <a:latin typeface="Arial"/>
               </a:rPr>
-              <a:t>La foto sale de ago-2026. Su estacionalidad propia ya está medida, pero el mix de un único mes puede no ser representativo.</a:t>
+              <a:t>Su estacionalidad propia ya está medida, pero el mix de 2 meses puede no ser representativo, y su demanda va un 40% por encima de la media de la ventana de 'hoy': parte de la mejora frente a lo medido es volumen, no parrilla.</a:t>
             </a:r>
           </a:p>
         </p:txBody>
@@ -4426,7 +4426,7 @@
                 </a:solidFill>
                 <a:latin typeface="Arial"/>
               </a:rPr>
-              <a:t>Refresco de Online a ago-2026, score EFX en tienda y su histórico de comportamiento para anclar el nivel de riesgo.</a:t>
+              <a:t>Refresco de Online a sep-2026, score EFX en tienda y su histórico de comportamiento para anclar el nivel de riesgo.</a:t>
             </a:r>
           </a:p>
           <a:p>
@@ -4501,7 +4501,7 @@
                 </a:solidFill>
                 <a:latin typeface="Arial"/>
               </a:rPr>
-              <a:t>Revisar en nov-2026 con H3 y en feb-2027 con H6 reales de tienda.</a:t>
+              <a:t>Revisar en dic-2026 con H3 y en mar-2027 con H6 reales de tienda.</a:t>
             </a:r>
           </a:p>
         </p:txBody>
@@ -4597,7 +4597,7 @@
                 </a:solidFill>
                 <a:latin typeface="Arial"/>
               </a:rPr>
-              <a:t>Online mar-2025 a feb-2026  ·  tienda ago-2026</a:t>
+              <a:t>Online mar-2025 a feb-2026  ·  tienda ago-2026 a sep-2026</a:t>
             </a:r>
           </a:p>
         </p:txBody>
@@ -5130,7 +5130,7 @@
                 </a:solidFill>
                 <a:latin typeface="Arial"/>
               </a:rPr>
-              <a:t>62,5%</a:t>
+              <a:t>61,2%</a:t>
             </a:r>
           </a:p>
         </p:txBody>
@@ -5169,7 +5169,7 @@
                 </a:solidFill>
                 <a:latin typeface="Arial"/>
               </a:rPr>
-              <a:t>TA, desde 47,6% hoy</a:t>
+              <a:t>TA, desde 47,2% hoy</a:t>
             </a:r>
           </a:p>
         </p:txBody>
@@ -5293,7 +5293,7 @@
                 </a:solidFill>
                 <a:latin typeface="Arial"/>
               </a:rPr>
-              <a:t>3,66%</a:t>
+              <a:t>3,51%</a:t>
             </a:r>
           </a:p>
         </p:txBody>
@@ -5648,7 +5648,7 @@
                           </a:solidFill>
                           <a:latin typeface="Arial"/>
                         </a:rPr>
-                        <a:t>31,4%</a:t>
+                        <a:t>32,7%</a:t>
                       </a:r>
                     </a:p>
                   </a:txBody>
@@ -5671,7 +5671,7 @@
                           </a:solidFill>
                           <a:latin typeface="Arial"/>
                         </a:rPr>
-                        <a:t>16,8 M€/mes</a:t>
+                        <a:t>18,5 M€/mes</a:t>
                       </a:r>
                     </a:p>
                   </a:txBody>
@@ -5719,7 +5719,7 @@
                           </a:solidFill>
                           <a:latin typeface="Arial"/>
                         </a:rPr>
-                        <a:t>&gt; 68</a:t>
+                        <a:t>&gt; 62</a:t>
                       </a:r>
                     </a:p>
                   </a:txBody>
@@ -5742,7 +5742,7 @@
                           </a:solidFill>
                           <a:latin typeface="Arial"/>
                         </a:rPr>
-                        <a:t>17,7%</a:t>
+                        <a:t>21,6%</a:t>
                       </a:r>
                     </a:p>
                   </a:txBody>
@@ -5765,7 +5765,7 @@
                           </a:solidFill>
                           <a:latin typeface="Arial"/>
                         </a:rPr>
-                        <a:t>9,5 M€/mes</a:t>
+                        <a:t>12,2 M€/mes</a:t>
                       </a:r>
                     </a:p>
                   </a:txBody>
@@ -5836,7 +5836,7 @@
                           </a:solidFill>
                           <a:latin typeface="Arial"/>
                         </a:rPr>
-                        <a:t>25,3%</a:t>
+                        <a:t>26,5%</a:t>
                       </a:r>
                     </a:p>
                   </a:txBody>
@@ -5859,7 +5859,7 @@
                           </a:solidFill>
                           <a:latin typeface="Arial"/>
                         </a:rPr>
-                        <a:t>13,6 M€/mes</a:t>
+                        <a:t>15,0 M€/mes</a:t>
                       </a:r>
                     </a:p>
                   </a:txBody>
@@ -5907,7 +5907,7 @@
                           </a:solidFill>
                           <a:latin typeface="Arial"/>
                         </a:rPr>
-                        <a:t>&gt; 43</a:t>
+                        <a:t>&gt; 38</a:t>
                       </a:r>
                     </a:p>
                   </a:txBody>
@@ -5930,7 +5930,7 @@
                           </a:solidFill>
                           <a:latin typeface="Arial"/>
                         </a:rPr>
-                        <a:t>28,1%</a:t>
+                        <a:t>30,8%</a:t>
                       </a:r>
                     </a:p>
                   </a:txBody>
@@ -5953,7 +5953,7 @@
                           </a:solidFill>
                           <a:latin typeface="Arial"/>
                         </a:rPr>
-                        <a:t>15,1 M€/mes</a:t>
+                        <a:t>17,4 M€/mes</a:t>
                       </a:r>
                     </a:p>
                   </a:txBody>
@@ -6024,7 +6024,7 @@
                           </a:solidFill>
                           <a:latin typeface="Arial"/>
                         </a:rPr>
-                        <a:t>31,3%</a:t>
+                        <a:t>32,5%</a:t>
                       </a:r>
                     </a:p>
                   </a:txBody>
@@ -6047,7 +6047,7 @@
                           </a:solidFill>
                           <a:latin typeface="Arial"/>
                         </a:rPr>
-                        <a:t>16,8 M€/mes</a:t>
+                        <a:t>18,4 M€/mes</a:t>
                       </a:r>
                     </a:p>
                   </a:txBody>
@@ -6155,7 +6155,7 @@
                 </a:solidFill>
                 <a:latin typeface="Arial"/>
               </a:rPr>
-              <a:t>los tramos poco aceptados llevan uplift (hasta 2,4x). Apenas mueve los cortes: donde se decide, Online ya acepta al 84-98%.</a:t>
+              <a:t>los tramos poco aceptados llevan uplift (hasta 2,4x). Apenas mueve los cortes: donde se decide, Online ya acepta al 84-97%.</a:t>
             </a:r>
           </a:p>
         </p:txBody>
@@ -6216,7 +6216,7 @@
         <p:spPr>
           <a:xfrm>
             <a:off x="6464808" y="3758184"/>
-            <a:ext cx="5166360" cy="2399782"/>
+            <a:ext cx="5166360" cy="2395879"/>
           </a:xfrm>
           <a:prstGeom prst="rect">
             <a:avLst/>
@@ -6702,7 +6702,7 @@
                 </a:solidFill>
                 <a:latin typeface="Arial"/>
               </a:rPr>
-              <a:t>Medido sobre el histórico propio de tienda, misma ventana que Online: para describir dónde está hoy no hace falta imputar nada. Acepta casi el triple que Online y arriesga menos. Aviso: su TA viene cayendo (58,7% de mar-2025 a feb-2026, 47,6% en ago-2026), así que la base se está moviendo.</a:t>
+              <a:t>Medido sobre el histórico propio de tienda, misma ventana que Online: para describir dónde está hoy no hace falta imputar nada. Acepta casi el triple que Online y arriesga menos. Aviso: su TA viene cayendo (58,7% de mar-2025 a feb-2026, 47,2% en ago-2026 a sep-2026), así que la base se está moviendo.</a:t>
             </a:r>
           </a:p>
         </p:txBody>
@@ -6798,7 +6798,7 @@
                 </a:solidFill>
                 <a:latin typeface="Arial"/>
               </a:rPr>
-              <a:t>Tienda ago-2026</a:t>
+              <a:t>Tienda ago-2026 a sep-2026</a:t>
             </a:r>
           </a:p>
         </p:txBody>
@@ -6944,7 +6944,7 @@
                 </a:solidFill>
                 <a:latin typeface="Arial"/>
               </a:rPr>
-              <a:t>Las dos columnas miden la misma población —el único mes con score EFX—, por eso aquí el 'hoy' es 47,6% y en la slide anterior 58,7%. Sustitución de la regla de score; las demás reglas de tienda se mantienen. El riesgo va imputado desde la curva de Online, con el nivel anclado al realizado de tienda.</a:t>
+              <a:t>Las dos columnas miden la misma población —ago-2026 a sep-2026, lo único con score EFX en tienda—, por eso aquí el 'hoy' es 47,2% y en la slide anterior 58,7%. Sustitución de la regla de score; las demás reglas de tienda se mantienen. El riesgo va imputado desde la curva de Online, con el nivel anclado al realizado de tienda.</a:t>
             </a:r>
           </a:p>
         </p:txBody>
@@ -7040,7 +7040,7 @@
                 </a:solidFill>
                 <a:latin typeface="Arial"/>
               </a:rPr>
-              <a:t>Online mar-2025 a feb-2026  ·  tienda ago-2026</a:t>
+              <a:t>Online mar-2025 a feb-2026  ·  tienda ago-2026 a sep-2026</a:t>
             </a:r>
           </a:p>
         </p:txBody>
@@ -7162,7 +7162,7 @@
         </p:nvGraphicFramePr>
         <p:xfrm>
           <a:off x="7543800" y="1655064"/>
-          <a:ext cx="4343400" cy="2816352"/>
+          <a:ext cx="4343400" cy="2852928"/>
         </p:xfrm>
         <a:graphic>
           <a:graphicData uri="http://schemas.openxmlformats.org/drawingml/2006/table">
@@ -7176,7 +7176,7 @@
                 <a:gridCol w="868680"/>
                 <a:gridCol w="868680"/>
               </a:tblGrid>
-              <a:tr h="256032">
+              <a:tr h="237744">
                 <a:tc>
                   <a:txBody>
                     <a:bodyPr/>
@@ -7270,7 +7270,7 @@
                   </a:tcPr>
                 </a:tc>
               </a:tr>
-              <a:tr h="256032">
+              <a:tr h="237744">
                 <a:tc>
                   <a:txBody>
                     <a:bodyPr/>
@@ -7364,7 +7364,7 @@
                   </a:tcPr>
                 </a:tc>
               </a:tr>
-              <a:tr h="256032">
+              <a:tr h="237744">
                 <a:tc>
                   <a:txBody>
                     <a:bodyPr/>
@@ -7378,6 +7378,100 @@
                           </a:solidFill>
                           <a:latin typeface="Arial"/>
                         </a:rPr>
+                        <a:t>Hoy, base escenarios</a:t>
+                      </a:r>
+                    </a:p>
+                  </a:txBody>
+                  <a:tcPr>
+                    <a:solidFill>
+                      <a:srgbClr val="FFFFFF"/>
+                    </a:solidFill>
+                  </a:tcPr>
+                </a:tc>
+                <a:tc>
+                  <a:txBody>
+                    <a:bodyPr/>
+                    <a:lstStyle/>
+                    <a:p>
+                      <a:pPr algn="r"/>
+                      <a:r>
+                        <a:rPr sz="1150" b="0">
+                          <a:solidFill>
+                            <a:srgbClr val="5D6D7E"/>
+                          </a:solidFill>
+                          <a:latin typeface="Arial"/>
+                        </a:rPr>
+                        <a:t>política vigente</a:t>
+                      </a:r>
+                    </a:p>
+                  </a:txBody>
+                  <a:tcPr>
+                    <a:solidFill>
+                      <a:srgbClr val="FFFFFF"/>
+                    </a:solidFill>
+                  </a:tcPr>
+                </a:tc>
+                <a:tc>
+                  <a:txBody>
+                    <a:bodyPr/>
+                    <a:lstStyle/>
+                    <a:p>
+                      <a:pPr algn="r"/>
+                      <a:r>
+                        <a:rPr sz="1150" b="0">
+                          <a:solidFill>
+                            <a:srgbClr val="5D6D7E"/>
+                          </a:solidFill>
+                          <a:latin typeface="Arial"/>
+                        </a:rPr>
+                        <a:t>—</a:t>
+                      </a:r>
+                    </a:p>
+                  </a:txBody>
+                  <a:tcPr>
+                    <a:solidFill>
+                      <a:srgbClr val="FFFFFF"/>
+                    </a:solidFill>
+                  </a:tcPr>
+                </a:tc>
+                <a:tc>
+                  <a:txBody>
+                    <a:bodyPr/>
+                    <a:lstStyle/>
+                    <a:p>
+                      <a:pPr algn="r"/>
+                      <a:r>
+                        <a:rPr sz="1150" b="0">
+                          <a:solidFill>
+                            <a:srgbClr val="5D6D7E"/>
+                          </a:solidFill>
+                          <a:latin typeface="Arial"/>
+                        </a:rPr>
+                        <a:t>28,5%</a:t>
+                      </a:r>
+                    </a:p>
+                  </a:txBody>
+                  <a:tcPr>
+                    <a:solidFill>
+                      <a:srgbClr val="FFFFFF"/>
+                    </a:solidFill>
+                  </a:tcPr>
+                </a:tc>
+              </a:tr>
+              <a:tr h="237744">
+                <a:tc>
+                  <a:txBody>
+                    <a:bodyPr/>
+                    <a:lstStyle/>
+                    <a:p>
+                      <a:pPr algn="l"/>
+                      <a:r>
+                        <a:rPr sz="1150" b="0">
+                          <a:solidFill>
+                            <a:srgbClr val="5D6D7E"/>
+                          </a:solidFill>
+                          <a:latin typeface="Arial"/>
+                        </a:rPr>
                         <a:t>Parrilla Online en ambos canales</a:t>
                       </a:r>
                     </a:p>
@@ -7424,7 +7518,7 @@
                           </a:solidFill>
                           <a:latin typeface="Arial"/>
                         </a:rPr>
-                        <a:t>58,3%</a:t>
+                        <a:t>58,9%</a:t>
                       </a:r>
                     </a:p>
                   </a:txBody>
@@ -7447,7 +7541,7 @@
                           </a:solidFill>
                           <a:latin typeface="Arial"/>
                         </a:rPr>
-                        <a:t>31,4%</a:t>
+                        <a:t>32,7%</a:t>
                       </a:r>
                     </a:p>
                   </a:txBody>
@@ -7458,7 +7552,7 @@
                   </a:tcPr>
                 </a:tc>
               </a:tr>
-              <a:tr h="256032">
+              <a:tr h="237744">
                 <a:tc>
                   <a:txBody>
                     <a:bodyPr/>
@@ -7495,7 +7589,7 @@
                           </a:solidFill>
                           <a:latin typeface="Arial"/>
                         </a:rPr>
-                        <a:t>&gt; 68</a:t>
+                        <a:t>&gt; 62</a:t>
                       </a:r>
                     </a:p>
                   </a:txBody>
@@ -7518,7 +7612,7 @@
                           </a:solidFill>
                           <a:latin typeface="Arial"/>
                         </a:rPr>
-                        <a:t>31,9%</a:t>
+                        <a:t>38,1%</a:t>
                       </a:r>
                     </a:p>
                   </a:txBody>
@@ -7541,7 +7635,7 @@
                           </a:solidFill>
                           <a:latin typeface="Arial"/>
                         </a:rPr>
-                        <a:t>17,7%</a:t>
+                        <a:t>21,6%</a:t>
                       </a:r>
                     </a:p>
                   </a:txBody>
@@ -7552,7 +7646,7 @@
                   </a:tcPr>
                 </a:tc>
               </a:tr>
-              <a:tr h="256032">
+              <a:tr h="237744">
                 <a:tc>
                   <a:txBody>
                     <a:bodyPr/>
@@ -7589,7 +7683,7 @@
                           </a:solidFill>
                           <a:latin typeface="Arial"/>
                         </a:rPr>
-                        <a:t>+38p</a:t>
+                        <a:t>+36p</a:t>
                       </a:r>
                     </a:p>
                   </a:txBody>
@@ -7612,7 +7706,7 @@
                           </a:solidFill>
                           <a:latin typeface="Arial"/>
                         </a:rPr>
-                        <a:t>35,9%</a:t>
+                        <a:t>38,2%</a:t>
                       </a:r>
                     </a:p>
                   </a:txBody>
@@ -7635,7 +7729,7 @@
                           </a:solidFill>
                           <a:latin typeface="Arial"/>
                         </a:rPr>
-                        <a:t>19,8%</a:t>
+                        <a:t>21,7%</a:t>
                       </a:r>
                     </a:p>
                   </a:txBody>
@@ -7646,7 +7740,7 @@
                   </a:tcPr>
                 </a:tc>
               </a:tr>
-              <a:tr h="256032">
+              <a:tr h="237744">
                 <a:tc>
                   <a:txBody>
                     <a:bodyPr/>
@@ -7706,7 +7800,7 @@
                           </a:solidFill>
                           <a:latin typeface="Arial"/>
                         </a:rPr>
-                        <a:t>46,3%</a:t>
+                        <a:t>47,0%</a:t>
                       </a:r>
                     </a:p>
                   </a:txBody>
@@ -7729,7 +7823,7 @@
                           </a:solidFill>
                           <a:latin typeface="Arial"/>
                         </a:rPr>
-                        <a:t>25,3%</a:t>
+                        <a:t>26,5%</a:t>
                       </a:r>
                     </a:p>
                   </a:txBody>
@@ -7740,7 +7834,7 @@
                   </a:tcPr>
                 </a:tc>
               </a:tr>
-              <a:tr h="256032">
+              <a:tr h="237744">
                 <a:tc>
                   <a:txBody>
                     <a:bodyPr/>
@@ -7777,7 +7871,7 @@
                           </a:solidFill>
                           <a:latin typeface="Arial"/>
                         </a:rPr>
-                        <a:t>+25p</a:t>
+                        <a:t>+23p</a:t>
                       </a:r>
                     </a:p>
                   </a:txBody>
@@ -7800,7 +7894,7 @@
                           </a:solidFill>
                           <a:latin typeface="Arial"/>
                         </a:rPr>
-                        <a:t>46,6%</a:t>
+                        <a:t>48,8%</a:t>
                       </a:r>
                     </a:p>
                   </a:txBody>
@@ -7823,7 +7917,7 @@
                           </a:solidFill>
                           <a:latin typeface="Arial"/>
                         </a:rPr>
-                        <a:t>25,4%</a:t>
+                        <a:t>27,5%</a:t>
                       </a:r>
                     </a:p>
                   </a:txBody>
@@ -7834,7 +7928,7 @@
                   </a:tcPr>
                 </a:tc>
               </a:tr>
-              <a:tr h="256032">
+              <a:tr h="237744">
                 <a:tc>
                   <a:txBody>
                     <a:bodyPr/>
@@ -7871,7 +7965,7 @@
                           </a:solidFill>
                           <a:latin typeface="Arial"/>
                         </a:rPr>
-                        <a:t>&gt; 43</a:t>
+                        <a:t>&gt; 38</a:t>
                       </a:r>
                     </a:p>
                   </a:txBody>
@@ -7894,7 +7988,7 @@
                           </a:solidFill>
                           <a:latin typeface="Arial"/>
                         </a:rPr>
-                        <a:t>51,8%</a:t>
+                        <a:t>55,2%</a:t>
                       </a:r>
                     </a:p>
                   </a:txBody>
@@ -7917,7 +8011,7 @@
                           </a:solidFill>
                           <a:latin typeface="Arial"/>
                         </a:rPr>
-                        <a:t>28,1%</a:t>
+                        <a:t>30,8%</a:t>
                       </a:r>
                     </a:p>
                   </a:txBody>
@@ -7928,7 +8022,7 @@
                   </a:tcPr>
                 </a:tc>
               </a:tr>
-              <a:tr h="256032">
+              <a:tr h="237744">
                 <a:tc>
                   <a:txBody>
                     <a:bodyPr/>
@@ -7965,7 +8059,7 @@
                           </a:solidFill>
                           <a:latin typeface="Arial"/>
                         </a:rPr>
-                        <a:t>+13p</a:t>
+                        <a:t>+10p</a:t>
                       </a:r>
                     </a:p>
                   </a:txBody>
@@ -7988,7 +8082,7 @@
                           </a:solidFill>
                           <a:latin typeface="Arial"/>
                         </a:rPr>
-                        <a:t>54,1%</a:t>
+                        <a:t>56,0%</a:t>
                       </a:r>
                     </a:p>
                   </a:txBody>
@@ -8011,7 +8105,7 @@
                           </a:solidFill>
                           <a:latin typeface="Arial"/>
                         </a:rPr>
-                        <a:t>29,3%</a:t>
+                        <a:t>31,2%</a:t>
                       </a:r>
                     </a:p>
                   </a:txBody>
@@ -8022,7 +8116,7 @@
                   </a:tcPr>
                 </a:tc>
               </a:tr>
-              <a:tr h="256032">
+              <a:tr h="237744">
                 <a:tc>
                   <a:txBody>
                     <a:bodyPr/>
@@ -8082,7 +8176,7 @@
                           </a:solidFill>
                           <a:latin typeface="Arial"/>
                         </a:rPr>
-                        <a:t>58,1%</a:t>
+                        <a:t>58,6%</a:t>
                       </a:r>
                     </a:p>
                   </a:txBody>
@@ -8105,7 +8199,7 @@
                           </a:solidFill>
                           <a:latin typeface="Arial"/>
                         </a:rPr>
-                        <a:t>31,3%</a:t>
+                        <a:t>32,5%</a:t>
                       </a:r>
                     </a:p>
                   </a:txBody>
@@ -8116,7 +8210,7 @@
                   </a:tcPr>
                 </a:tc>
               </a:tr>
-              <a:tr h="256032">
+              <a:tr h="237744">
                 <a:tc>
                   <a:txBody>
                     <a:bodyPr/>
@@ -8176,7 +8270,7 @@
                           </a:solidFill>
                           <a:latin typeface="Arial"/>
                         </a:rPr>
-                        <a:t>58,3%</a:t>
+                        <a:t>58,9%</a:t>
                       </a:r>
                     </a:p>
                   </a:txBody>
@@ -8199,7 +8293,7 @@
                           </a:solidFill>
                           <a:latin typeface="Arial"/>
                         </a:rPr>
-                        <a:t>31,4%</a:t>
+                        <a:t>32,7%</a:t>
                       </a:r>
                     </a:p>
                   </a:txBody>
@@ -8262,7 +8356,7 @@
         <p:spPr>
           <a:xfrm>
             <a:off x="566928" y="5543790"/>
-            <a:ext cx="6720840" cy="1005840"/>
+            <a:ext cx="6720840" cy="1280160"/>
           </a:xfrm>
           <a:prstGeom prst="rect">
             <a:avLst/>
@@ -8287,7 +8381,7 @@
                 </a:solidFill>
                 <a:latin typeface="Arial"/>
               </a:rPr>
-              <a:t>La parrilla vigente calca las decisiones reales de Online (acepta el 51,8% de la demanda; el motor aprobó el 51,9%: swap-in 0,6%, swap-out 0,6%) y cada solicitud aceptada convierte a la tasa de su decisión real. La diferencia entre 16,8 y 15,3 M€/mes es por tanto la ganancia de tienda, medida sobre ago-2026 (único mes con EFX) frente a la ventana completa de 'hoy'.</a:t>
+              <a:t>La parrilla vigente calca las decisiones reales de Online (acepta el 51,8% de la demanda; el motor aprobó el 51,9%: swap-in 0,6%, swap-out 0,6%) y cada solicitud aceptada convierte a la tasa de su decisión real. Online modelado y medido coinciden: la diferencia entre 18,5 y 15,3 M€/mes es tienda. Esa diferencia tiene dos partes: la parrilla (+2,3 M€/mes sobre la misma base, 16,2 → 18,5) y el volumen (+0,9 M€: la demanda de tienda en ago-2026 a sep-2026 va un 40% por encima de la media de la ventana de 'hoy').</a:t>
             </a:r>
           </a:p>
         </p:txBody>
@@ -8862,7 +8956,7 @@
                           </a:solidFill>
                           <a:latin typeface="Arial"/>
                         </a:rPr>
-                        <a:t>&gt; 68</a:t>
+                        <a:t>&gt; 62</a:t>
                       </a:r>
                     </a:p>
                   </a:txBody>
@@ -8908,7 +9002,7 @@
                           </a:solidFill>
                           <a:latin typeface="Arial"/>
                         </a:rPr>
-                        <a:t>&gt; 43</a:t>
+                        <a:t>&gt; 38</a:t>
                       </a:r>
                     </a:p>
                   </a:txBody>
@@ -9002,7 +9096,7 @@
                           </a:solidFill>
                           <a:latin typeface="Arial"/>
                         </a:rPr>
-                        <a:t>&gt; 68</a:t>
+                        <a:t>&gt; 62</a:t>
                       </a:r>
                     </a:p>
                   </a:txBody>
@@ -9048,7 +9142,7 @@
                           </a:solidFill>
                           <a:latin typeface="Arial"/>
                         </a:rPr>
-                        <a:t>&gt; 43</a:t>
+                        <a:t>&gt; 38</a:t>
                       </a:r>
                     </a:p>
                   </a:txBody>
@@ -9142,7 +9236,7 @@
                           </a:solidFill>
                           <a:latin typeface="Arial"/>
                         </a:rPr>
-                        <a:t>&gt; 68</a:t>
+                        <a:t>&gt; 62</a:t>
                       </a:r>
                     </a:p>
                   </a:txBody>
@@ -9188,7 +9282,7 @@
                           </a:solidFill>
                           <a:latin typeface="Arial"/>
                         </a:rPr>
-                        <a:t>&gt; 43</a:t>
+                        <a:t>&gt; 38</a:t>
                       </a:r>
                     </a:p>
                   </a:txBody>
@@ -9282,7 +9376,7 @@
                           </a:solidFill>
                           <a:latin typeface="Arial"/>
                         </a:rPr>
-                        <a:t>&gt; 68</a:t>
+                        <a:t>&gt; 62</a:t>
                       </a:r>
                     </a:p>
                   </a:txBody>
@@ -9328,7 +9422,7 @@
                           </a:solidFill>
                           <a:latin typeface="Arial"/>
                         </a:rPr>
-                        <a:t>&gt; 43</a:t>
+                        <a:t>&gt; 38</a:t>
                       </a:r>
                     </a:p>
                   </a:txBody>
@@ -9771,7 +9865,7 @@
                           </a:solidFill>
                           <a:latin typeface="Arial"/>
                         </a:rPr>
-                        <a:t>&gt; 65</a:t>
+                        <a:t>&gt; 63</a:t>
                       </a:r>
                     </a:p>
                   </a:txBody>
@@ -9794,7 +9888,7 @@
                           </a:solidFill>
                           <a:latin typeface="Arial"/>
                         </a:rPr>
-                        <a:t>&gt; 52</a:t>
+                        <a:t>&gt; 50</a:t>
                       </a:r>
                     </a:p>
                   </a:txBody>
@@ -9817,7 +9911,7 @@
                           </a:solidFill>
                           <a:latin typeface="Arial"/>
                         </a:rPr>
-                        <a:t>&gt; 40</a:t>
+                        <a:t>&gt; 37</a:t>
                       </a:r>
                     </a:p>
                   </a:txBody>
@@ -9911,7 +10005,7 @@
                           </a:solidFill>
                           <a:latin typeface="Arial"/>
                         </a:rPr>
-                        <a:t>&gt; 60</a:t>
+                        <a:t>&gt; 58</a:t>
                       </a:r>
                     </a:p>
                   </a:txBody>
@@ -9934,7 +10028,7 @@
                           </a:solidFill>
                           <a:latin typeface="Arial"/>
                         </a:rPr>
-                        <a:t>&gt; 47</a:t>
+                        <a:t>&gt; 45</a:t>
                       </a:r>
                     </a:p>
                   </a:txBody>
@@ -9957,7 +10051,7 @@
                           </a:solidFill>
                           <a:latin typeface="Arial"/>
                         </a:rPr>
-                        <a:t>&gt; 35</a:t>
+                        <a:t>&gt; 32</a:t>
                       </a:r>
                     </a:p>
                   </a:txBody>
@@ -10051,7 +10145,7 @@
                           </a:solidFill>
                           <a:latin typeface="Arial"/>
                         </a:rPr>
-                        <a:t>&gt; 54</a:t>
+                        <a:t>&gt; 52</a:t>
                       </a:r>
                     </a:p>
                   </a:txBody>
@@ -10074,7 +10168,7 @@
                           </a:solidFill>
                           <a:latin typeface="Arial"/>
                         </a:rPr>
-                        <a:t>&gt; 41</a:t>
+                        <a:t>&gt; 39</a:t>
                       </a:r>
                     </a:p>
                   </a:txBody>
@@ -10097,7 +10191,7 @@
                           </a:solidFill>
                           <a:latin typeface="Arial"/>
                         </a:rPr>
-                        <a:t>&gt; 29</a:t>
+                        <a:t>&gt; 26</a:t>
                       </a:r>
                     </a:p>
                   </a:txBody>
@@ -10191,7 +10285,7 @@
                           </a:solidFill>
                           <a:latin typeface="Arial"/>
                         </a:rPr>
-                        <a:t>&gt; 60</a:t>
+                        <a:t>&gt; 58</a:t>
                       </a:r>
                     </a:p>
                   </a:txBody>
@@ -10214,7 +10308,7 @@
                           </a:solidFill>
                           <a:latin typeface="Arial"/>
                         </a:rPr>
-                        <a:t>&gt; 47</a:t>
+                        <a:t>&gt; 45</a:t>
                       </a:r>
                     </a:p>
                   </a:txBody>
@@ -10237,7 +10331,7 @@
                           </a:solidFill>
                           <a:latin typeface="Arial"/>
                         </a:rPr>
-                        <a:t>&gt; 35</a:t>
+                        <a:t>&gt; 32</a:t>
                       </a:r>
                     </a:p>
                   </a:txBody>
@@ -10545,7 +10639,7 @@
                 </a:solidFill>
                 <a:latin typeface="Arial"/>
               </a:rPr>
-              <a:t>Online mar-2025 a feb-2026  ·  tienda ago-2026</a:t>
+              <a:t>Online mar-2025 a feb-2026  ·  tienda ago-2026 a sep-2026</a:t>
             </a:r>
           </a:p>
         </p:txBody>
@@ -11389,7 +11483,7 @@
                 </a:solidFill>
                 <a:latin typeface="Arial"/>
               </a:rPr>
-              <a:t>La curva de Online predice un 3,79% sobre la cartera contratada de tienda; lo realmente observado es 3,74%. Se reescala por 0,988 para que reproduzca el dato. El nivel deja de ser un supuesto: solo queda asumido el poder discriminante.</a:t>
+              <a:t>La curva de Online predice un 3,93% sobre la cartera contratada de tienda; lo realmente observado es 3,74%. Se reescala por 0,952 para que reproduzca el dato. El nivel deja de ser un supuesto: solo queda asumido el poder discriminante.</a:t>
             </a:r>
           </a:p>
         </p:txBody>
@@ -11768,7 +11862,7 @@
                 </a:solidFill>
                 <a:latin typeface="Arial"/>
               </a:rPr>
-              <a:t>El problema: tienda solo tiene un mes con score, y es agosto</a:t>
+              <a:t>El problema: tienda solo tiene score en ago-2026 a sep-2026</a:t>
             </a:r>
           </a:p>
         </p:txBody>
@@ -11807,7 +11901,7 @@
                 </a:solidFill>
                 <a:latin typeface="Arial"/>
               </a:rPr>
-              <a:t>El score EFX se activó en tienda en ago-2026. Comparar un mes suelto contra una media de doce exige saber cuánto vale ese mes.</a:t>
+              <a:t>El score EFX se activó en tienda en ago-2026. Comparar 2 meses sueltos contra una media de doce exige saber cuánto vale cada mes.</a:t>
             </a:r>
           </a:p>
         </p:txBody>
@@ -11968,7 +12062,7 @@
                 </a:solidFill>
                 <a:latin typeface="Arial"/>
               </a:rPr>
-              <a:t>Agosto no es un mes medio, y cada canal tiene el suyo</a:t>
+              <a:t>Agosto y septiembre: ningún mes medio, y cada canal tiene el suyo</a:t>
             </a:r>
           </a:p>
         </p:txBody>
@@ -12007,7 +12101,7 @@
                 </a:solidFill>
                 <a:latin typeface="Arial"/>
               </a:rPr>
-              <a:t>Índice de agosto: 0,49 en Online y 0,76 en tienda. Online concentra la demanda en el lanzamiento de iPhone (sep 2,03) y tienda en Navidad (dic 1,70). La correlación entre ambos perfiles es 0,39: no son el mismo patrón.</a:t>
+              <a:t>Índice de ago y sep: 0,49 / 2,03 en Online y 0,76 / 0,69 en tienda. Online concentra la demanda en el lanzamiento de iPhone (sep 2,03) y tienda en Navidad (dic 1,70). La correlación entre ambos perfiles es 0,39: no son el mismo patrón.</a:t>
             </a:r>
           </a:p>
         </p:txBody>
@@ -12207,7 +12301,7 @@
                 </a:solidFill>
                 <a:latin typeface="Arial"/>
               </a:rPr>
-              <a:t>El run-rate no se divide por el número de meses sino por la suma del índice estacional de los meses cubiertos. Una ventana natural completa suma 12,00 y no altera nada; el agosto de tienda suma 0,76 y corrige por ser un mes flojo.</a:t>
+              <a:t>El run-rate no se divide por el número de meses sino por la suma del índice estacional de los meses cubiertos. Una ventana natural completa suma 12,00 y no altera nada; la ventana de tienda (ago-2026 a sep-2026) suma 1,45 y corrige por caer en meses flojos de tienda.</a:t>
             </a:r>
           </a:p>
         </p:txBody>
@@ -12407,7 +12501,7 @@
                 </a:solidFill>
                 <a:latin typeface="Arial"/>
               </a:rPr>
-              <a:t>Sin corregir, tienda parecía pesar el 20% de la demanda. Con su estacionalidad propia pesa el 25%. Si se le hubiera aplicado la de Online —lo único posible antes de tener su histórico— habríamos dicho 34%, y todos los escenarios saldrían con más producción de la real.</a:t>
+              <a:t>Sin corregir, tienda parecía pesar el 23% de la demanda. Con su estacionalidad propia pesa el 29%. Si se le hubiera aplicado la de Online —lo único posible antes de tener su histórico— habríamos dicho 19%, y todos los escenarios saldrían con menos producción de la real.</a:t>
             </a:r>
           </a:p>
         </p:txBody>
@@ -12485,7 +12579,7 @@
                 </a:solidFill>
                 <a:latin typeface="Arial"/>
               </a:rPr>
-              <a:t>El índice se estima promediando años naturales completos, de modo que el crecimiento de volumen entre años no se confunda con estacionalidad. Lo que queda abierto es si el mix de un único mes de tienda es representativo del año.</a:t>
+              <a:t>El índice se estima promediando años naturales completos, de modo que el crecimiento de volumen entre años no se confunda con estacionalidad. Lo que queda abierto es si el mix de ago-2026 a sep-2026 en tienda es representativo del año.</a:t>
             </a:r>
           </a:p>
         </p:txBody>
